--- a/courseware/202610_ADS_W07_Matrix_Queue_Stack_Greedy.pptx
+++ b/courseware/202610_ADS_W07_Matrix_Queue_Stack_Greedy.pptx
@@ -15493,6 +15493,16 @@
               <a:t>。</a:t>
             </a:r>
             <a:r>
+              <a:rPr sz="1879" b="1" i="0">
+                <a:solidFill>
+                  <a:srgbClr val="12395B"/>
+                </a:solidFill>
+                <a:latin typeface="Consolas"/>
+                <a:ea typeface="Consolas"/>
+              </a:rPr>
+              <a:t>list.pop(0)</a:t>
+            </a:r>
+            <a:r>
               <a:rPr sz="2000" b="1" i="0">
                 <a:solidFill>
                   <a:srgbClr val="12395B"/>
@@ -15500,7 +15510,7 @@
                 <a:latin typeface="Segoe UI"/>
                 <a:ea typeface="微软雅黑"/>
               </a:rPr>
-              <a:t>`list.pop(0)` 是头号错误写法</a:t>
+              <a:t> 是头号错误写法</a:t>
             </a:r>
           </a:p>
           <a:p>
